--- a/morning-registration-activities/form-time-quiz-christmas/downloads/Form_Time_Quiz_Christmas_Year_10_and_11.pptx
+++ b/morning-registration-activities/form-time-quiz-christmas/downloads/Form_Time_Quiz_Christmas_Year_10_and_11.pptx
@@ -3193,7 +3193,7 @@
                 <a:solidFill>
                   <a:srgbClr val="2F5A44"/>
                 </a:solidFill>
-                <a:latin typeface="Karla"/>
+                <a:latin typeface="Calibri"/>
               </a:rPr>
               <a:t>MORNING REGISTRATION ACTIVITIES</a:t>
             </a:r>
@@ -3231,11 +3231,11 @@
               </a:spcAft>
             </a:pPr>
             <a:r>
-              <a:rPr sz="3000" b="1" i="0">
+              <a:rPr sz="3000" b="0" i="0">
                 <a:solidFill>
                   <a:srgbClr val="2F5A44"/>
                 </a:solidFill>
-                <a:latin typeface="Libre Caslon Display"/>
+                <a:latin typeface="Georgia"/>
               </a:rPr>
               <a:t>The Form Time Quiz</a:t>
             </a:r>
@@ -3290,7 +3290,7 @@
                 <a:solidFill>
                   <a:srgbClr val="FFFDF7"/>
                 </a:solidFill>
-                <a:latin typeface="Karla"/>
+                <a:latin typeface="Calibri"/>
               </a:rPr>
               <a:t>CHRISTMAS EDITION  ·  YEAR 10 AND 11</a:t>
             </a:r>
@@ -3332,7 +3332,7 @@
                 <a:solidFill>
                   <a:srgbClr val="5C6552"/>
                 </a:solidFill>
-                <a:latin typeface="Karla"/>
+                <a:latin typeface="Calibri"/>
               </a:rPr>
               <a:t>Ten questions: four fact or myth, then three with options and three to write.</a:t>
             </a:r>
@@ -3482,11 +3482,11 @@
               </a:spcAft>
             </a:pPr>
             <a:r>
-              <a:rPr sz="1350" b="1" i="0">
+              <a:rPr sz="1350" b="0" i="0">
                 <a:solidFill>
                   <a:srgbClr val="2F5A44"/>
                 </a:solidFill>
-                <a:latin typeface="Libre Caslon Display"/>
+                <a:latin typeface="Georgia"/>
               </a:rPr>
               <a:t>Get into teams</a:t>
             </a:r>
@@ -3528,7 +3528,7 @@
                 <a:solidFill>
                   <a:srgbClr val="5C6552"/>
                 </a:solidFill>
-                <a:latin typeface="Karla"/>
+                <a:latin typeface="Calibri"/>
               </a:rPr>
               <a:t>Three or four to a team, with one answer sheet between you.</a:t>
             </a:r>
@@ -3678,11 +3678,11 @@
               </a:spcAft>
             </a:pPr>
             <a:r>
-              <a:rPr sz="1350" b="1" i="0">
+              <a:rPr sz="1350" b="0" i="0">
                 <a:solidFill>
                   <a:srgbClr val="2F5A44"/>
                 </a:solidFill>
-                <a:latin typeface="Libre Caslon Display"/>
+                <a:latin typeface="Georgia"/>
               </a:rPr>
               <a:t>Answer together</a:t>
             </a:r>
@@ -3724,7 +3724,7 @@
                 <a:solidFill>
                   <a:srgbClr val="5C6552"/>
                 </a:solidFill>
-                <a:latin typeface="Karla"/>
+                <a:latin typeface="Calibri"/>
               </a:rPr>
               <a:t>Each question goes up on the board. Agree an answer, then write it down.</a:t>
             </a:r>
@@ -3874,11 +3874,11 @@
               </a:spcAft>
             </a:pPr>
             <a:r>
-              <a:rPr sz="1350" b="1" i="0">
+              <a:rPr sz="1350" b="0" i="0">
                 <a:solidFill>
                   <a:srgbClr val="2F5A44"/>
                 </a:solidFill>
-                <a:latin typeface="Libre Caslon Display"/>
+                <a:latin typeface="Georgia"/>
               </a:rPr>
               <a:t>Swap and mark</a:t>
             </a:r>
@@ -3920,7 +3920,7 @@
                 <a:solidFill>
                   <a:srgbClr val="5C6552"/>
                 </a:solidFill>
-                <a:latin typeface="Karla"/>
+                <a:latin typeface="Calibri"/>
               </a:rPr>
               <a:t>Swap sheets with the team next to you, then the answers go up one at a time.</a:t>
             </a:r>
@@ -3962,7 +3962,7 @@
                 <a:solidFill>
                   <a:srgbClr val="8B9179"/>
                 </a:solidFill>
-                <a:latin typeface="Karla"/>
+                <a:latin typeface="Calibri"/>
               </a:rPr>
               <a:t>Needs: one answer sheet per team, from the resource pack.</a:t>
             </a:r>
@@ -4028,7 +4028,7 @@
                 <a:solidFill>
                   <a:srgbClr val="8B9179"/>
                 </a:solidFill>
-                <a:latin typeface="Karla"/>
+                <a:latin typeface="Calibri"/>
               </a:rPr>
               <a:t>The Pastoral Guide</a:t>
             </a:r>
@@ -4070,7 +4070,7 @@
                 <a:solidFill>
                   <a:srgbClr val="8B9179"/>
                 </a:solidFill>
-                <a:latin typeface="Karla"/>
+                <a:latin typeface="Calibri"/>
               </a:rPr>
               <a:t>1 / 27</a:t>
             </a:r>
@@ -4174,7 +4174,7 @@
                 <a:solidFill>
                   <a:srgbClr val="2F5A44"/>
                 </a:solidFill>
-                <a:latin typeface="Karla"/>
+                <a:latin typeface="Calibri"/>
               </a:rPr>
               <a:t>CHRISTMAS QUIZ  ·  ROUND TWO  ·  QUESTION 7 OF 10</a:t>
             </a:r>
@@ -4350,7 +4350,7 @@
                 <a:solidFill>
                   <a:srgbClr val="FFFDF7"/>
                 </a:solidFill>
-                <a:latin typeface="Karla"/>
+                <a:latin typeface="Calibri"/>
               </a:rPr>
               <a:t>7</a:t>
             </a:r>
@@ -4388,11 +4388,11 @@
               </a:spcAft>
             </a:pPr>
             <a:r>
-              <a:rPr sz="2400" b="1" i="0">
+              <a:rPr sz="2400" b="0" i="0">
                 <a:solidFill>
                   <a:srgbClr val="2F5A44"/>
                 </a:solidFill>
-                <a:latin typeface="Libre Caslon Display"/>
+                <a:latin typeface="Georgia"/>
               </a:rPr>
               <a:t>The poinsettia, the red Christmas plant, first grew wild in which country?</a:t>
             </a:r>
@@ -4434,7 +4434,7 @@
                 <a:solidFill>
                   <a:srgbClr val="8B9179"/>
                 </a:solidFill>
-                <a:latin typeface="Karla"/>
+                <a:latin typeface="Calibri"/>
               </a:rPr>
               <a:t>ONE OF THESE</a:t>
             </a:r>
@@ -4610,7 +4610,7 @@
                 <a:solidFill>
                   <a:srgbClr val="FFFDF7"/>
                 </a:solidFill>
-                <a:latin typeface="Karla"/>
+                <a:latin typeface="Calibri"/>
               </a:rPr>
               <a:t>A</a:t>
             </a:r>
@@ -4652,7 +4652,7 @@
                 <a:solidFill>
                   <a:srgbClr val="2E3436"/>
                 </a:solidFill>
-                <a:latin typeface="Karla"/>
+                <a:latin typeface="Calibri"/>
               </a:rPr>
               <a:t>Norway</a:t>
             </a:r>
@@ -4828,7 +4828,7 @@
                 <a:solidFill>
                   <a:srgbClr val="FFFDF7"/>
                 </a:solidFill>
-                <a:latin typeface="Karla"/>
+                <a:latin typeface="Calibri"/>
               </a:rPr>
               <a:t>B</a:t>
             </a:r>
@@ -4870,7 +4870,7 @@
                 <a:solidFill>
                   <a:srgbClr val="2E3436"/>
                 </a:solidFill>
-                <a:latin typeface="Karla"/>
+                <a:latin typeface="Calibri"/>
               </a:rPr>
               <a:t>Mexico</a:t>
             </a:r>
@@ -5046,7 +5046,7 @@
                 <a:solidFill>
                   <a:srgbClr val="FFFDF7"/>
                 </a:solidFill>
-                <a:latin typeface="Karla"/>
+                <a:latin typeface="Calibri"/>
               </a:rPr>
               <a:t>C</a:t>
             </a:r>
@@ -5088,7 +5088,7 @@
                 <a:solidFill>
                   <a:srgbClr val="2E3436"/>
                 </a:solidFill>
-                <a:latin typeface="Karla"/>
+                <a:latin typeface="Calibri"/>
               </a:rPr>
               <a:t>India</a:t>
             </a:r>
@@ -5130,7 +5130,7 @@
                 <a:solidFill>
                   <a:srgbClr val="5C6552"/>
                 </a:solidFill>
-                <a:latin typeface="Karla"/>
+                <a:latin typeface="Calibri"/>
               </a:rPr>
               <a:t>Agree it as a team, then tick it on the sheet.</a:t>
             </a:r>
@@ -5196,7 +5196,7 @@
                 <a:solidFill>
                   <a:srgbClr val="8B9179"/>
                 </a:solidFill>
-                <a:latin typeface="Karla"/>
+                <a:latin typeface="Calibri"/>
               </a:rPr>
               <a:t>The Pastoral Guide</a:t>
             </a:r>
@@ -5238,7 +5238,7 @@
                 <a:solidFill>
                   <a:srgbClr val="8B9179"/>
                 </a:solidFill>
-                <a:latin typeface="Karla"/>
+                <a:latin typeface="Calibri"/>
               </a:rPr>
               <a:t>10 / 27</a:t>
             </a:r>
@@ -5342,7 +5342,7 @@
                 <a:solidFill>
                   <a:srgbClr val="2F5A44"/>
                 </a:solidFill>
-                <a:latin typeface="Karla"/>
+                <a:latin typeface="Calibri"/>
               </a:rPr>
               <a:t>CHRISTMAS QUIZ  ·  ROUND TWO  ·  QUESTION 8 OF 10</a:t>
             </a:r>
@@ -5518,7 +5518,7 @@
                 <a:solidFill>
                   <a:srgbClr val="FFFDF7"/>
                 </a:solidFill>
-                <a:latin typeface="Karla"/>
+                <a:latin typeface="Calibri"/>
               </a:rPr>
               <a:t>8</a:t>
             </a:r>
@@ -5556,11 +5556,11 @@
               </a:spcAft>
             </a:pPr>
             <a:r>
-              <a:rPr sz="2400" b="1" i="0">
+              <a:rPr sz="2400" b="0" i="0">
                 <a:solidFill>
                   <a:srgbClr val="2F5A44"/>
                 </a:solidFill>
-                <a:latin typeface="Libre Caslon Display"/>
+                <a:latin typeface="Georgia"/>
               </a:rPr>
               <a:t>“Carol of the Bells” started as a song from which country?</a:t>
             </a:r>
@@ -5646,7 +5646,7 @@
                 <a:solidFill>
                   <a:srgbClr val="8B9179"/>
                 </a:solidFill>
-                <a:latin typeface="Karla"/>
+                <a:latin typeface="Calibri"/>
               </a:rPr>
               <a:t>Agree it as a team, then write it on the sheet.</a:t>
             </a:r>
@@ -5712,7 +5712,7 @@
                 <a:solidFill>
                   <a:srgbClr val="8B9179"/>
                 </a:solidFill>
-                <a:latin typeface="Karla"/>
+                <a:latin typeface="Calibri"/>
               </a:rPr>
               <a:t>The Pastoral Guide</a:t>
             </a:r>
@@ -5754,7 +5754,7 @@
                 <a:solidFill>
                   <a:srgbClr val="8B9179"/>
                 </a:solidFill>
-                <a:latin typeface="Karla"/>
+                <a:latin typeface="Calibri"/>
               </a:rPr>
               <a:t>11 / 27</a:t>
             </a:r>
@@ -5858,7 +5858,7 @@
                 <a:solidFill>
                   <a:srgbClr val="2F5A44"/>
                 </a:solidFill>
-                <a:latin typeface="Karla"/>
+                <a:latin typeface="Calibri"/>
               </a:rPr>
               <a:t>CHRISTMAS QUIZ  ·  ROUND TWO  ·  QUESTION 9 OF 10</a:t>
             </a:r>
@@ -6034,7 +6034,7 @@
                 <a:solidFill>
                   <a:srgbClr val="FFFDF7"/>
                 </a:solidFill>
-                <a:latin typeface="Karla"/>
+                <a:latin typeface="Calibri"/>
               </a:rPr>
               <a:t>9</a:t>
             </a:r>
@@ -6072,11 +6072,11 @@
               </a:spcAft>
             </a:pPr>
             <a:r>
-              <a:rPr sz="2400" b="1" i="0">
+              <a:rPr sz="2400" b="0" i="0">
                 <a:solidFill>
                   <a:srgbClr val="2F5A44"/>
                 </a:solidFill>
-                <a:latin typeface="Libre Caslon Display"/>
+                <a:latin typeface="Georgia"/>
               </a:rPr>
               <a:t>In Poland, families set an extra place at the Christmas Eve table. Who is it for?</a:t>
             </a:r>
@@ -6162,7 +6162,7 @@
                 <a:solidFill>
                   <a:srgbClr val="8B9179"/>
                 </a:solidFill>
-                <a:latin typeface="Karla"/>
+                <a:latin typeface="Calibri"/>
               </a:rPr>
               <a:t>Agree it as a team, then write it on the sheet.</a:t>
             </a:r>
@@ -6228,7 +6228,7 @@
                 <a:solidFill>
                   <a:srgbClr val="8B9179"/>
                 </a:solidFill>
-                <a:latin typeface="Karla"/>
+                <a:latin typeface="Calibri"/>
               </a:rPr>
               <a:t>The Pastoral Guide</a:t>
             </a:r>
@@ -6270,7 +6270,7 @@
                 <a:solidFill>
                   <a:srgbClr val="8B9179"/>
                 </a:solidFill>
-                <a:latin typeface="Karla"/>
+                <a:latin typeface="Calibri"/>
               </a:rPr>
               <a:t>12 / 27</a:t>
             </a:r>
@@ -6374,7 +6374,7 @@
                 <a:solidFill>
                   <a:srgbClr val="2F5A44"/>
                 </a:solidFill>
-                <a:latin typeface="Karla"/>
+                <a:latin typeface="Calibri"/>
               </a:rPr>
               <a:t>CHRISTMAS QUIZ  ·  ROUND TWO  ·  QUESTION 10 OF 10</a:t>
             </a:r>
@@ -6550,7 +6550,7 @@
                 <a:solidFill>
                   <a:srgbClr val="FFFDF7"/>
                 </a:solidFill>
-                <a:latin typeface="Karla"/>
+                <a:latin typeface="Calibri"/>
               </a:rPr>
               <a:t>10</a:t>
             </a:r>
@@ -6588,11 +6588,11 @@
               </a:spcAft>
             </a:pPr>
             <a:r>
-              <a:rPr sz="2400" b="1" i="0">
+              <a:rPr sz="2400" b="0" i="0">
                 <a:solidFill>
                   <a:srgbClr val="2F5A44"/>
                 </a:solidFill>
-                <a:latin typeface="Libre Caslon Display"/>
+                <a:latin typeface="Georgia"/>
               </a:rPr>
               <a:t>Iceland’s tradition of giving books on Christmas Eve is called the Christmas Book… what?</a:t>
             </a:r>
@@ -6678,7 +6678,7 @@
                 <a:solidFill>
                   <a:srgbClr val="8B9179"/>
                 </a:solidFill>
-                <a:latin typeface="Karla"/>
+                <a:latin typeface="Calibri"/>
               </a:rPr>
               <a:t>Agree it as a team, then write it on the sheet.</a:t>
             </a:r>
@@ -6744,7 +6744,7 @@
                 <a:solidFill>
                   <a:srgbClr val="8B9179"/>
                 </a:solidFill>
-                <a:latin typeface="Karla"/>
+                <a:latin typeface="Calibri"/>
               </a:rPr>
               <a:t>The Pastoral Guide</a:t>
             </a:r>
@@ -6786,7 +6786,7 @@
                 <a:solidFill>
                   <a:srgbClr val="8B9179"/>
                 </a:solidFill>
-                <a:latin typeface="Karla"/>
+                <a:latin typeface="Calibri"/>
               </a:rPr>
               <a:t>13 / 27</a:t>
             </a:r>
@@ -6903,7 +6903,7 @@
                 <a:solidFill>
                   <a:srgbClr val="2F5A44"/>
                 </a:solidFill>
-                <a:latin typeface="Karla"/>
+                <a:latin typeface="Calibri"/>
               </a:rPr>
               <a:t>ANSWERS</a:t>
             </a:r>
@@ -6941,11 +6941,11 @@
               </a:spcAft>
             </a:pPr>
             <a:r>
-              <a:rPr sz="4000" b="1" i="0">
+              <a:rPr sz="4000" b="0" i="0">
                 <a:solidFill>
                   <a:srgbClr val="FFFDF7"/>
                 </a:solidFill>
-                <a:latin typeface="Libre Caslon Display"/>
+                <a:latin typeface="Georgia"/>
               </a:rPr>
               <a:t>Swap sheets</a:t>
             </a:r>
@@ -7031,7 +7031,7 @@
                 <a:solidFill>
                   <a:srgbClr val="C6D5CA"/>
                 </a:solidFill>
-                <a:latin typeface="Karla"/>
+                <a:latin typeface="Calibri"/>
               </a:rPr>
               <a:t>Swap with the team next to you. Give one mark for each right answer, then add up the score out of ten.</a:t>
             </a:r>
@@ -7097,7 +7097,7 @@
                 <a:solidFill>
                   <a:srgbClr val="C6D5CA"/>
                 </a:solidFill>
-                <a:latin typeface="Karla"/>
+                <a:latin typeface="Calibri"/>
               </a:rPr>
               <a:t>The Pastoral Guide</a:t>
             </a:r>
@@ -7139,7 +7139,7 @@
                 <a:solidFill>
                   <a:srgbClr val="C6D5CA"/>
                 </a:solidFill>
-                <a:latin typeface="Karla"/>
+                <a:latin typeface="Calibri"/>
               </a:rPr>
               <a:t>14 / 27</a:t>
             </a:r>
@@ -7243,7 +7243,7 @@
                 <a:solidFill>
                   <a:srgbClr val="2F5A44"/>
                 </a:solidFill>
-                <a:latin typeface="Karla"/>
+                <a:latin typeface="Calibri"/>
               </a:rPr>
               <a:t>CHRISTMAS QUIZ  ·  ANSWERS  ·  QUESTION 1</a:t>
             </a:r>
@@ -7285,7 +7285,7 @@
                 <a:solidFill>
                   <a:srgbClr val="5C6552"/>
                 </a:solidFill>
-                <a:latin typeface="Karla"/>
+                <a:latin typeface="Calibri"/>
               </a:rPr>
               <a:t>Coca-Cola invented the red Santa suit.</a:t>
             </a:r>
@@ -7323,11 +7323,11 @@
               </a:spcAft>
             </a:pPr>
             <a:r>
-              <a:rPr sz="3400" b="1" i="0">
+              <a:rPr sz="3400" b="0" i="0">
                 <a:solidFill>
                   <a:srgbClr val="2F5A44"/>
                 </a:solidFill>
-                <a:latin typeface="Libre Caslon Display"/>
+                <a:latin typeface="Georgia"/>
               </a:rPr>
               <a:t>Myth</a:t>
             </a:r>
@@ -7459,7 +7459,7 @@
                 <a:solidFill>
                   <a:srgbClr val="2E3436"/>
                 </a:solidFill>
-                <a:latin typeface="Karla"/>
+                <a:latin typeface="Calibri"/>
               </a:rPr>
               <a:t>Santa was being drawn in red long before Coca-Cola’s Christmas adverts began in 1931. Coca-Cola’s own history page says the story is not true.</a:t>
             </a:r>
@@ -7525,7 +7525,7 @@
                 <a:solidFill>
                   <a:srgbClr val="8B9179"/>
                 </a:solidFill>
-                <a:latin typeface="Karla"/>
+                <a:latin typeface="Calibri"/>
               </a:rPr>
               <a:t>The Pastoral Guide</a:t>
             </a:r>
@@ -7567,7 +7567,7 @@
                 <a:solidFill>
                   <a:srgbClr val="8B9179"/>
                 </a:solidFill>
-                <a:latin typeface="Karla"/>
+                <a:latin typeface="Calibri"/>
               </a:rPr>
               <a:t>15 / 27</a:t>
             </a:r>
@@ -7671,7 +7671,7 @@
                 <a:solidFill>
                   <a:srgbClr val="2F5A44"/>
                 </a:solidFill>
-                <a:latin typeface="Karla"/>
+                <a:latin typeface="Calibri"/>
               </a:rPr>
               <a:t>CHRISTMAS QUIZ  ·  ANSWERS  ·  QUESTION 2</a:t>
             </a:r>
@@ -7713,7 +7713,7 @@
                 <a:solidFill>
                   <a:srgbClr val="5C6552"/>
                 </a:solidFill>
-                <a:latin typeface="Karla"/>
+                <a:latin typeface="Calibri"/>
               </a:rPr>
               <a:t>Writing “Xmas” is a modern way of taking Christ out of Christmas.</a:t>
             </a:r>
@@ -7751,11 +7751,11 @@
               </a:spcAft>
             </a:pPr>
             <a:r>
-              <a:rPr sz="3400" b="1" i="0">
+              <a:rPr sz="3400" b="0" i="0">
                 <a:solidFill>
                   <a:srgbClr val="2F5A44"/>
                 </a:solidFill>
-                <a:latin typeface="Libre Caslon Display"/>
+                <a:latin typeface="Georgia"/>
               </a:rPr>
               <a:t>Myth</a:t>
             </a:r>
@@ -7887,7 +7887,7 @@
                 <a:solidFill>
                   <a:srgbClr val="2E3436"/>
                 </a:solidFill>
-                <a:latin typeface="Karla"/>
+                <a:latin typeface="Calibri"/>
               </a:rPr>
               <a:t>X is the Greek letter chi, the first letter of Christ in Greek. Scribes have used it as a short form for around 900 years, and “Xmas” was in use by 1721.</a:t>
             </a:r>
@@ -7953,7 +7953,7 @@
                 <a:solidFill>
                   <a:srgbClr val="8B9179"/>
                 </a:solidFill>
-                <a:latin typeface="Karla"/>
+                <a:latin typeface="Calibri"/>
               </a:rPr>
               <a:t>The Pastoral Guide</a:t>
             </a:r>
@@ -7995,7 +7995,7 @@
                 <a:solidFill>
                   <a:srgbClr val="8B9179"/>
                 </a:solidFill>
-                <a:latin typeface="Karla"/>
+                <a:latin typeface="Calibri"/>
               </a:rPr>
               <a:t>16 / 27</a:t>
             </a:r>
@@ -8099,7 +8099,7 @@
                 <a:solidFill>
                   <a:srgbClr val="2F5A44"/>
                 </a:solidFill>
-                <a:latin typeface="Karla"/>
+                <a:latin typeface="Calibri"/>
               </a:rPr>
               <a:t>CHRISTMAS QUIZ  ·  ANSWERS  ·  QUESTION 3</a:t>
             </a:r>
@@ -8141,7 +8141,7 @@
                 <a:solidFill>
                   <a:srgbClr val="5C6552"/>
                 </a:solidFill>
-                <a:latin typeface="Karla"/>
+                <a:latin typeface="Calibri"/>
               </a:rPr>
               <a:t>A giant straw goat built every Christmas in Gävle, Sweden, has been destroyed more often than it has survived.</a:t>
             </a:r>
@@ -8179,11 +8179,11 @@
               </a:spcAft>
             </a:pPr>
             <a:r>
-              <a:rPr sz="3400" b="1" i="0">
+              <a:rPr sz="3400" b="0" i="0">
                 <a:solidFill>
                   <a:srgbClr val="2F5A44"/>
                 </a:solidFill>
-                <a:latin typeface="Libre Caslon Display"/>
+                <a:latin typeface="Georgia"/>
               </a:rPr>
               <a:t>Fact</a:t>
             </a:r>
@@ -8315,7 +8315,7 @@
                 <a:solidFill>
                   <a:srgbClr val="2E3436"/>
                 </a:solidFill>
-                <a:latin typeface="Karla"/>
+                <a:latin typeface="Calibri"/>
               </a:rPr>
               <a:t>Up to 2025, 43 of the 60 goats built since 1966 had been burned or damaged. One was burned on the day it went up.</a:t>
             </a:r>
@@ -8381,7 +8381,7 @@
                 <a:solidFill>
                   <a:srgbClr val="8B9179"/>
                 </a:solidFill>
-                <a:latin typeface="Karla"/>
+                <a:latin typeface="Calibri"/>
               </a:rPr>
               <a:t>The Pastoral Guide</a:t>
             </a:r>
@@ -8423,7 +8423,7 @@
                 <a:solidFill>
                   <a:srgbClr val="8B9179"/>
                 </a:solidFill>
-                <a:latin typeface="Karla"/>
+                <a:latin typeface="Calibri"/>
               </a:rPr>
               <a:t>17 / 27</a:t>
             </a:r>
@@ -8527,7 +8527,7 @@
                 <a:solidFill>
                   <a:srgbClr val="2F5A44"/>
                 </a:solidFill>
-                <a:latin typeface="Karla"/>
+                <a:latin typeface="Calibri"/>
               </a:rPr>
               <a:t>CHRISTMAS QUIZ  ·  ANSWERS  ·  QUESTION 4</a:t>
             </a:r>
@@ -8569,7 +8569,7 @@
                 <a:solidFill>
                   <a:srgbClr val="5C6552"/>
                 </a:solidFill>
-                <a:latin typeface="Karla"/>
+                <a:latin typeface="Calibri"/>
               </a:rPr>
               <a:t>In the Czech Republic, some families keep their Christmas dinner alive in the bath.</a:t>
             </a:r>
@@ -8607,11 +8607,11 @@
               </a:spcAft>
             </a:pPr>
             <a:r>
-              <a:rPr sz="3400" b="1" i="0">
+              <a:rPr sz="3400" b="0" i="0">
                 <a:solidFill>
                   <a:srgbClr val="2F5A44"/>
                 </a:solidFill>
-                <a:latin typeface="Libre Caslon Display"/>
+                <a:latin typeface="Georgia"/>
               </a:rPr>
               <a:t>Fact</a:t>
             </a:r>
@@ -8743,7 +8743,7 @@
                 <a:solidFill>
                   <a:srgbClr val="2E3436"/>
                 </a:solidFill>
-                <a:latin typeface="Karla"/>
+                <a:latin typeface="Calibri"/>
               </a:rPr>
               <a:t>The traditional Christmas Eve meal is carp, sold live from tanks in the street. Some families keep it swimming in the bath until it is cooked, though vets now advise against it.</a:t>
             </a:r>
@@ -8809,7 +8809,7 @@
                 <a:solidFill>
                   <a:srgbClr val="8B9179"/>
                 </a:solidFill>
-                <a:latin typeface="Karla"/>
+                <a:latin typeface="Calibri"/>
               </a:rPr>
               <a:t>The Pastoral Guide</a:t>
             </a:r>
@@ -8851,7 +8851,7 @@
                 <a:solidFill>
                   <a:srgbClr val="8B9179"/>
                 </a:solidFill>
-                <a:latin typeface="Karla"/>
+                <a:latin typeface="Calibri"/>
               </a:rPr>
               <a:t>18 / 27</a:t>
             </a:r>
@@ -8955,7 +8955,7 @@
                 <a:solidFill>
                   <a:srgbClr val="2F5A44"/>
                 </a:solidFill>
-                <a:latin typeface="Karla"/>
+                <a:latin typeface="Calibri"/>
               </a:rPr>
               <a:t>CHRISTMAS QUIZ  ·  ANSWERS  ·  QUESTION 5</a:t>
             </a:r>
@@ -8997,7 +8997,7 @@
                 <a:solidFill>
                   <a:srgbClr val="5C6552"/>
                 </a:solidFill>
-                <a:latin typeface="Karla"/>
+                <a:latin typeface="Calibri"/>
               </a:rPr>
               <a:t>When does Ethiopia celebrate Christmas?</a:t>
             </a:r>
@@ -9035,11 +9035,11 @@
               </a:spcAft>
             </a:pPr>
             <a:r>
-              <a:rPr sz="3400" b="1" i="0">
+              <a:rPr sz="3400" b="0" i="0">
                 <a:solidFill>
                   <a:srgbClr val="2F5A44"/>
                 </a:solidFill>
-                <a:latin typeface="Libre Caslon Display"/>
+                <a:latin typeface="Georgia"/>
               </a:rPr>
               <a:t>B.  7 January</a:t>
             </a:r>
@@ -9171,7 +9171,7 @@
                 <a:solidFill>
                   <a:srgbClr val="2E3436"/>
                 </a:solidFill>
-                <a:latin typeface="Karla"/>
+                <a:latin typeface="Calibri"/>
               </a:rPr>
               <a:t>The Ethiopian Orthodox Church follows an older calendar. Christmas is called Genna, and many people fast for 43 days beforehand.</a:t>
             </a:r>
@@ -9237,7 +9237,7 @@
                 <a:solidFill>
                   <a:srgbClr val="8B9179"/>
                 </a:solidFill>
-                <a:latin typeface="Karla"/>
+                <a:latin typeface="Calibri"/>
               </a:rPr>
               <a:t>The Pastoral Guide</a:t>
             </a:r>
@@ -9279,7 +9279,7 @@
                 <a:solidFill>
                   <a:srgbClr val="8B9179"/>
                 </a:solidFill>
-                <a:latin typeface="Karla"/>
+                <a:latin typeface="Calibri"/>
               </a:rPr>
               <a:t>19 / 27</a:t>
             </a:r>
@@ -9396,7 +9396,7 @@
                 <a:solidFill>
                   <a:srgbClr val="2F5A44"/>
                 </a:solidFill>
-                <a:latin typeface="Karla"/>
+                <a:latin typeface="Calibri"/>
               </a:rPr>
               <a:t>ROUND ONE</a:t>
             </a:r>
@@ -9434,11 +9434,11 @@
               </a:spcAft>
             </a:pPr>
             <a:r>
-              <a:rPr sz="4000" b="1" i="0">
+              <a:rPr sz="4000" b="0" i="0">
                 <a:solidFill>
                   <a:srgbClr val="FFFDF7"/>
                 </a:solidFill>
-                <a:latin typeface="Libre Caslon Display"/>
+                <a:latin typeface="Georgia"/>
               </a:rPr>
               <a:t>Fact or myth</a:t>
             </a:r>
@@ -9524,7 +9524,7 @@
                 <a:solidFill>
                   <a:srgbClr val="C6D5CA"/>
                 </a:solidFill>
-                <a:latin typeface="Karla"/>
+                <a:latin typeface="Calibri"/>
               </a:rPr>
               <a:t>Four statements about Christmas. As a team, decide whether each one is a fact or a myth.</a:t>
             </a:r>
@@ -9590,7 +9590,7 @@
                 <a:solidFill>
                   <a:srgbClr val="C6D5CA"/>
                 </a:solidFill>
-                <a:latin typeface="Karla"/>
+                <a:latin typeface="Calibri"/>
               </a:rPr>
               <a:t>The Pastoral Guide</a:t>
             </a:r>
@@ -9632,7 +9632,7 @@
                 <a:solidFill>
                   <a:srgbClr val="C6D5CA"/>
                 </a:solidFill>
-                <a:latin typeface="Karla"/>
+                <a:latin typeface="Calibri"/>
               </a:rPr>
               <a:t>2 / 27</a:t>
             </a:r>
@@ -9736,7 +9736,7 @@
                 <a:solidFill>
                   <a:srgbClr val="2F5A44"/>
                 </a:solidFill>
-                <a:latin typeface="Karla"/>
+                <a:latin typeface="Calibri"/>
               </a:rPr>
               <a:t>CHRISTMAS QUIZ  ·  ANSWERS  ·  QUESTION 6</a:t>
             </a:r>
@@ -9778,7 +9778,7 @@
                 <a:solidFill>
                   <a:srgbClr val="5C6552"/>
                 </a:solidFill>
-                <a:latin typeface="Karla"/>
+                <a:latin typeface="Calibri"/>
               </a:rPr>
               <a:t>In Caracas, Venezuela, how did many people traditionally travel to early morning Christmas church services?</a:t>
             </a:r>
@@ -9816,11 +9816,11 @@
               </a:spcAft>
             </a:pPr>
             <a:r>
-              <a:rPr sz="3400" b="1" i="0">
+              <a:rPr sz="3400" b="0" i="0">
                 <a:solidFill>
                   <a:srgbClr val="2F5A44"/>
                 </a:solidFill>
-                <a:latin typeface="Libre Caslon Display"/>
+                <a:latin typeface="Georgia"/>
               </a:rPr>
               <a:t>C.  On roller skates</a:t>
             </a:r>
@@ -9952,7 +9952,7 @@
                 <a:solidFill>
                   <a:srgbClr val="2E3436"/>
                 </a:solidFill>
-                <a:latin typeface="Karla"/>
+                <a:latin typeface="Calibri"/>
               </a:rPr>
               <a:t>Some roads were closed to cars early in the morning so skaters could get there safely. The custom is less common now.</a:t>
             </a:r>
@@ -10018,7 +10018,7 @@
                 <a:solidFill>
                   <a:srgbClr val="8B9179"/>
                 </a:solidFill>
-                <a:latin typeface="Karla"/>
+                <a:latin typeface="Calibri"/>
               </a:rPr>
               <a:t>The Pastoral Guide</a:t>
             </a:r>
@@ -10060,7 +10060,7 @@
                 <a:solidFill>
                   <a:srgbClr val="8B9179"/>
                 </a:solidFill>
-                <a:latin typeface="Karla"/>
+                <a:latin typeface="Calibri"/>
               </a:rPr>
               <a:t>20 / 27</a:t>
             </a:r>
@@ -10164,7 +10164,7 @@
                 <a:solidFill>
                   <a:srgbClr val="2F5A44"/>
                 </a:solidFill>
-                <a:latin typeface="Karla"/>
+                <a:latin typeface="Calibri"/>
               </a:rPr>
               <a:t>CHRISTMAS QUIZ  ·  ANSWERS  ·  QUESTION 7</a:t>
             </a:r>
@@ -10206,7 +10206,7 @@
                 <a:solidFill>
                   <a:srgbClr val="5C6552"/>
                 </a:solidFill>
-                <a:latin typeface="Karla"/>
+                <a:latin typeface="Calibri"/>
               </a:rPr>
               <a:t>The poinsettia, the red Christmas plant, first grew wild in which country?</a:t>
             </a:r>
@@ -10244,11 +10244,11 @@
               </a:spcAft>
             </a:pPr>
             <a:r>
-              <a:rPr sz="3400" b="1" i="0">
+              <a:rPr sz="3400" b="0" i="0">
                 <a:solidFill>
                   <a:srgbClr val="2F5A44"/>
                 </a:solidFill>
-                <a:latin typeface="Libre Caslon Display"/>
+                <a:latin typeface="Georgia"/>
               </a:rPr>
               <a:t>B.  Mexico</a:t>
             </a:r>
@@ -10380,7 +10380,7 @@
                 <a:solidFill>
                   <a:srgbClr val="2E3436"/>
                 </a:solidFill>
-                <a:latin typeface="Karla"/>
+                <a:latin typeface="Calibri"/>
               </a:rPr>
               <a:t>The Aztecs grew it long before it was a Christmas plant. The red parts are leaves, not petals.</a:t>
             </a:r>
@@ -10446,7 +10446,7 @@
                 <a:solidFill>
                   <a:srgbClr val="8B9179"/>
                 </a:solidFill>
-                <a:latin typeface="Karla"/>
+                <a:latin typeface="Calibri"/>
               </a:rPr>
               <a:t>The Pastoral Guide</a:t>
             </a:r>
@@ -10488,7 +10488,7 @@
                 <a:solidFill>
                   <a:srgbClr val="8B9179"/>
                 </a:solidFill>
-                <a:latin typeface="Karla"/>
+                <a:latin typeface="Calibri"/>
               </a:rPr>
               <a:t>21 / 27</a:t>
             </a:r>
@@ -10592,7 +10592,7 @@
                 <a:solidFill>
                   <a:srgbClr val="2F5A44"/>
                 </a:solidFill>
-                <a:latin typeface="Karla"/>
+                <a:latin typeface="Calibri"/>
               </a:rPr>
               <a:t>CHRISTMAS QUIZ  ·  ANSWERS  ·  QUESTION 8</a:t>
             </a:r>
@@ -10634,7 +10634,7 @@
                 <a:solidFill>
                   <a:srgbClr val="5C6552"/>
                 </a:solidFill>
-                <a:latin typeface="Karla"/>
+                <a:latin typeface="Calibri"/>
               </a:rPr>
               <a:t>“Carol of the Bells” started as a song from which country?</a:t>
             </a:r>
@@ -10672,11 +10672,11 @@
               </a:spcAft>
             </a:pPr>
             <a:r>
-              <a:rPr sz="3400" b="1" i="0">
+              <a:rPr sz="3400" b="0" i="0">
                 <a:solidFill>
                   <a:srgbClr val="2F5A44"/>
                 </a:solidFill>
-                <a:latin typeface="Libre Caslon Display"/>
+                <a:latin typeface="Georgia"/>
               </a:rPr>
               <a:t>Ukraine</a:t>
             </a:r>
@@ -10808,7 +10808,7 @@
                 <a:solidFill>
                   <a:srgbClr val="2E3436"/>
                 </a:solidFill>
-                <a:latin typeface="Karla"/>
+                <a:latin typeface="Calibri"/>
               </a:rPr>
               <a:t>It was a New Year song called “Shchedryk”, about a swallow bringing news of a good year. The English Christmas words were added in America in 1936.</a:t>
             </a:r>
@@ -10874,7 +10874,7 @@
                 <a:solidFill>
                   <a:srgbClr val="8B9179"/>
                 </a:solidFill>
-                <a:latin typeface="Karla"/>
+                <a:latin typeface="Calibri"/>
               </a:rPr>
               <a:t>The Pastoral Guide</a:t>
             </a:r>
@@ -10916,7 +10916,7 @@
                 <a:solidFill>
                   <a:srgbClr val="8B9179"/>
                 </a:solidFill>
-                <a:latin typeface="Karla"/>
+                <a:latin typeface="Calibri"/>
               </a:rPr>
               <a:t>22 / 27</a:t>
             </a:r>
@@ -11020,7 +11020,7 @@
                 <a:solidFill>
                   <a:srgbClr val="2F5A44"/>
                 </a:solidFill>
-                <a:latin typeface="Karla"/>
+                <a:latin typeface="Calibri"/>
               </a:rPr>
               <a:t>CHRISTMAS QUIZ  ·  ANSWERS  ·  QUESTION 9</a:t>
             </a:r>
@@ -11062,7 +11062,7 @@
                 <a:solidFill>
                   <a:srgbClr val="5C6552"/>
                 </a:solidFill>
-                <a:latin typeface="Karla"/>
+                <a:latin typeface="Calibri"/>
               </a:rPr>
               <a:t>In Poland, families set an extra place at the Christmas Eve table. Who is it for?</a:t>
             </a:r>
@@ -11100,11 +11100,11 @@
               </a:spcAft>
             </a:pPr>
             <a:r>
-              <a:rPr sz="3400" b="1" i="0">
+              <a:rPr sz="3400" b="0" i="0">
                 <a:solidFill>
                   <a:srgbClr val="2F5A44"/>
                 </a:solidFill>
-                <a:latin typeface="Libre Caslon Display"/>
+                <a:latin typeface="Georgia"/>
               </a:rPr>
               <a:t>An unexpected guest</a:t>
             </a:r>
@@ -11236,7 +11236,7 @@
                 <a:solidFill>
                   <a:srgbClr val="2E3436"/>
                 </a:solidFill>
-                <a:latin typeface="Karla"/>
+                <a:latin typeface="Calibri"/>
               </a:rPr>
               <a:t>It means anyone who knocks will be welcome. The meal traditionally starts when the first star appears in the sky.</a:t>
             </a:r>
@@ -11302,7 +11302,7 @@
                 <a:solidFill>
                   <a:srgbClr val="8B9179"/>
                 </a:solidFill>
-                <a:latin typeface="Karla"/>
+                <a:latin typeface="Calibri"/>
               </a:rPr>
               <a:t>The Pastoral Guide</a:t>
             </a:r>
@@ -11344,7 +11344,7 @@
                 <a:solidFill>
                   <a:srgbClr val="8B9179"/>
                 </a:solidFill>
-                <a:latin typeface="Karla"/>
+                <a:latin typeface="Calibri"/>
               </a:rPr>
               <a:t>23 / 27</a:t>
             </a:r>
@@ -11448,7 +11448,7 @@
                 <a:solidFill>
                   <a:srgbClr val="2F5A44"/>
                 </a:solidFill>
-                <a:latin typeface="Karla"/>
+                <a:latin typeface="Calibri"/>
               </a:rPr>
               <a:t>CHRISTMAS QUIZ  ·  ANSWERS  ·  QUESTION 10</a:t>
             </a:r>
@@ -11490,7 +11490,7 @@
                 <a:solidFill>
                   <a:srgbClr val="5C6552"/>
                 </a:solidFill>
-                <a:latin typeface="Karla"/>
+                <a:latin typeface="Calibri"/>
               </a:rPr>
               <a:t>Iceland’s tradition of giving books on Christmas Eve is called the Christmas Book… what?</a:t>
             </a:r>
@@ -11528,11 +11528,11 @@
               </a:spcAft>
             </a:pPr>
             <a:r>
-              <a:rPr sz="3400" b="1" i="0">
+              <a:rPr sz="3400" b="0" i="0">
                 <a:solidFill>
                   <a:srgbClr val="2F5A44"/>
                 </a:solidFill>
-                <a:latin typeface="Libre Caslon Display"/>
+                <a:latin typeface="Georgia"/>
               </a:rPr>
               <a:t>Flood</a:t>
             </a:r>
@@ -11664,7 +11664,7 @@
                 <a:solidFill>
                   <a:srgbClr val="2E3436"/>
                 </a:solidFill>
-                <a:latin typeface="Karla"/>
+                <a:latin typeface="Calibri"/>
               </a:rPr>
               <a:t>It began in 1944, when most imports were restricted but paper was easier to get. Every home in Iceland is sent a free catalogue of new books before Christmas.</a:t>
             </a:r>
@@ -11730,7 +11730,7 @@
                 <a:solidFill>
                   <a:srgbClr val="8B9179"/>
                 </a:solidFill>
-                <a:latin typeface="Karla"/>
+                <a:latin typeface="Calibri"/>
               </a:rPr>
               <a:t>The Pastoral Guide</a:t>
             </a:r>
@@ -11772,7 +11772,7 @@
                 <a:solidFill>
                   <a:srgbClr val="8B9179"/>
                 </a:solidFill>
-                <a:latin typeface="Karla"/>
+                <a:latin typeface="Calibri"/>
               </a:rPr>
               <a:t>24 / 27</a:t>
             </a:r>
@@ -11876,7 +11876,7 @@
                 <a:solidFill>
                   <a:srgbClr val="2F5A44"/>
                 </a:solidFill>
-                <a:latin typeface="Karla"/>
+                <a:latin typeface="Calibri"/>
               </a:rPr>
               <a:t>THE FORM TIME QUIZ  ·  CHRISTMAS EDITION</a:t>
             </a:r>
@@ -11938,11 +11938,11 @@
               </a:spcAft>
             </a:pPr>
             <a:r>
-              <a:rPr sz="3200" b="1" i="0">
+              <a:rPr sz="3200" b="0" i="0">
                 <a:solidFill>
                   <a:srgbClr val="2F5A44"/>
                 </a:solidFill>
-                <a:latin typeface="Libre Caslon Display"/>
+                <a:latin typeface="Georgia"/>
               </a:rPr>
               <a:t>Scores back to their owners</a:t>
             </a:r>
@@ -11984,7 +11984,7 @@
                 <a:solidFill>
                   <a:srgbClr val="5C6552"/>
                 </a:solidFill>
-                <a:latin typeface="Karla"/>
+                <a:latin typeface="Calibri"/>
               </a:rPr>
               <a:t>Hands up if you got ten. Then hands up if one of the answers surprised you, and tell us which.</a:t>
             </a:r>
@@ -12026,7 +12026,7 @@
                 <a:solidFill>
                   <a:srgbClr val="8B9179"/>
                 </a:solidFill>
-                <a:latin typeface="Karla"/>
+                <a:latin typeface="Calibri"/>
               </a:rPr>
               <a:t>More free quizzes and form time activities at thepastoralguide.com.</a:t>
             </a:r>
@@ -12092,7 +12092,7 @@
                 <a:solidFill>
                   <a:srgbClr val="8B9179"/>
                 </a:solidFill>
-                <a:latin typeface="Karla"/>
+                <a:latin typeface="Calibri"/>
               </a:rPr>
               <a:t>The Pastoral Guide</a:t>
             </a:r>
@@ -12134,7 +12134,7 @@
                 <a:solidFill>
                   <a:srgbClr val="8B9179"/>
                 </a:solidFill>
-                <a:latin typeface="Karla"/>
+                <a:latin typeface="Calibri"/>
               </a:rPr>
               <a:t>25 / 27</a:t>
             </a:r>
@@ -12251,7 +12251,7 @@
                 <a:solidFill>
                   <a:srgbClr val="963A36"/>
                 </a:solidFill>
-                <a:latin typeface="Karla"/>
+                <a:latin typeface="Calibri"/>
               </a:rPr>
               <a:t>FOR THE TEACHER  ·  ADD YOUR OWN</a:t>
             </a:r>
@@ -12427,7 +12427,7 @@
                 <a:solidFill>
                   <a:srgbClr val="FFFDF7"/>
                 </a:solidFill>
-                <a:latin typeface="Karla"/>
+                <a:latin typeface="Calibri"/>
               </a:rPr>
               <a:t>?</a:t>
             </a:r>
@@ -12465,11 +12465,11 @@
               </a:spcAft>
             </a:pPr>
             <a:r>
-              <a:rPr sz="2400" b="1" i="0">
+              <a:rPr sz="2400" b="0" i="0">
                 <a:solidFill>
                   <a:srgbClr val="2F5A44"/>
                 </a:solidFill>
-                <a:latin typeface="Libre Caslon Display"/>
+                <a:latin typeface="Georgia"/>
               </a:rPr>
               <a:t>[ Type your own question here ]</a:t>
             </a:r>
@@ -12511,7 +12511,7 @@
                 <a:solidFill>
                   <a:srgbClr val="5C6552"/>
                 </a:solidFill>
-                <a:latin typeface="Karla"/>
+                <a:latin typeface="Calibri"/>
               </a:rPr>
               <a:t>Add your own questions here: something from assembly, a date coming up, or a question about your own school.</a:t>
             </a:r>
@@ -12533,7 +12533,7 @@
                 <a:solidFill>
                   <a:srgbClr val="5C6552"/>
                 </a:solidFill>
-                <a:latin typeface="Karla"/>
+                <a:latin typeface="Calibri"/>
               </a:rPr>
               <a:t>Duplicate this slide for each one and drag it in after question 10. There are two spare rows on the answer sheet for them.</a:t>
             </a:r>
@@ -12599,7 +12599,7 @@
                 <a:solidFill>
                   <a:srgbClr val="8B9179"/>
                 </a:solidFill>
-                <a:latin typeface="Karla"/>
+                <a:latin typeface="Calibri"/>
               </a:rPr>
               <a:t>The Pastoral Guide</a:t>
             </a:r>
@@ -12641,7 +12641,7 @@
                 <a:solidFill>
                   <a:srgbClr val="8B9179"/>
                 </a:solidFill>
-                <a:latin typeface="Karla"/>
+                <a:latin typeface="Calibri"/>
               </a:rPr>
               <a:t>26 / 27</a:t>
             </a:r>
@@ -12758,7 +12758,7 @@
                 <a:solidFill>
                   <a:srgbClr val="963A36"/>
                 </a:solidFill>
-                <a:latin typeface="Karla"/>
+                <a:latin typeface="Calibri"/>
               </a:rPr>
               <a:t>FOR THE TEACHER  ·  ADD YOUR OWN</a:t>
             </a:r>
@@ -12800,7 +12800,7 @@
                 <a:solidFill>
                   <a:srgbClr val="5C6552"/>
                 </a:solidFill>
-                <a:latin typeface="Karla"/>
+                <a:latin typeface="Calibri"/>
               </a:rPr>
               <a:t>[ Your question again, so the room remembers it ]</a:t>
             </a:r>
@@ -12838,11 +12838,11 @@
               </a:spcAft>
             </a:pPr>
             <a:r>
-              <a:rPr sz="3400" b="1" i="0">
+              <a:rPr sz="3400" b="0" i="0">
                 <a:solidFill>
                   <a:srgbClr val="2F5A44"/>
                 </a:solidFill>
-                <a:latin typeface="Libre Caslon Display"/>
+                <a:latin typeface="Georgia"/>
               </a:rPr>
               <a:t>[ The answer ]</a:t>
             </a:r>
@@ -12974,7 +12974,7 @@
                 <a:solidFill>
                   <a:srgbClr val="2E3436"/>
                 </a:solidFill>
-                <a:latin typeface="Karla"/>
+                <a:latin typeface="Calibri"/>
               </a:rPr>
               <a:t>[ One line on why, if there is something worth knowing ]</a:t>
             </a:r>
@@ -13016,7 +13016,7 @@
                 <a:solidFill>
                   <a:srgbClr val="5C6552"/>
                 </a:solidFill>
-                <a:latin typeface="Karla"/>
+                <a:latin typeface="Calibri"/>
               </a:rPr>
               <a:t>Duplicate this slide for each of your own questions and drag it in after the answer to question 10.</a:t>
             </a:r>
@@ -13082,7 +13082,7 @@
                 <a:solidFill>
                   <a:srgbClr val="8B9179"/>
                 </a:solidFill>
-                <a:latin typeface="Karla"/>
+                <a:latin typeface="Calibri"/>
               </a:rPr>
               <a:t>The Pastoral Guide</a:t>
             </a:r>
@@ -13124,7 +13124,7 @@
                 <a:solidFill>
                   <a:srgbClr val="8B9179"/>
                 </a:solidFill>
-                <a:latin typeface="Karla"/>
+                <a:latin typeface="Calibri"/>
               </a:rPr>
               <a:t>27 / 27</a:t>
             </a:r>
@@ -13228,7 +13228,7 @@
                 <a:solidFill>
                   <a:srgbClr val="2F5A44"/>
                 </a:solidFill>
-                <a:latin typeface="Karla"/>
+                <a:latin typeface="Calibri"/>
               </a:rPr>
               <a:t>CHRISTMAS QUIZ  ·  ROUND ONE  ·  QUESTION 1 OF 10</a:t>
             </a:r>
@@ -13404,7 +13404,7 @@
                 <a:solidFill>
                   <a:srgbClr val="FFFDF7"/>
                 </a:solidFill>
-                <a:latin typeface="Karla"/>
+                <a:latin typeface="Calibri"/>
               </a:rPr>
               <a:t>1</a:t>
             </a:r>
@@ -13442,11 +13442,11 @@
               </a:spcAft>
             </a:pPr>
             <a:r>
-              <a:rPr sz="2400" b="1" i="0">
+              <a:rPr sz="2400" b="0" i="0">
                 <a:solidFill>
                   <a:srgbClr val="2F5A44"/>
                 </a:solidFill>
-                <a:latin typeface="Libre Caslon Display"/>
+                <a:latin typeface="Georgia"/>
               </a:rPr>
               <a:t>Coca-Cola invented the red Santa suit.</a:t>
             </a:r>
@@ -13488,7 +13488,7 @@
                 <a:solidFill>
                   <a:srgbClr val="8B9179"/>
                 </a:solidFill>
-                <a:latin typeface="Karla"/>
+                <a:latin typeface="Calibri"/>
               </a:rPr>
               <a:t>FACT OR MYTH?</a:t>
             </a:r>
@@ -13616,11 +13616,11 @@
               </a:spcAft>
             </a:pPr>
             <a:r>
-              <a:rPr sz="2000" b="1" i="0">
+              <a:rPr sz="2000" b="0" i="0">
                 <a:solidFill>
                   <a:srgbClr val="2F5A44"/>
                 </a:solidFill>
-                <a:latin typeface="Libre Caslon Display"/>
+                <a:latin typeface="Georgia"/>
               </a:rPr>
               <a:t>Fact</a:t>
             </a:r>
@@ -13748,11 +13748,11 @@
               </a:spcAft>
             </a:pPr>
             <a:r>
-              <a:rPr sz="2000" b="1" i="0">
+              <a:rPr sz="2000" b="0" i="0">
                 <a:solidFill>
                   <a:srgbClr val="2F5A44"/>
                 </a:solidFill>
-                <a:latin typeface="Libre Caslon Display"/>
+                <a:latin typeface="Georgia"/>
               </a:rPr>
               <a:t>Myth</a:t>
             </a:r>
@@ -13794,7 +13794,7 @@
                 <a:solidFill>
                   <a:srgbClr val="5C6552"/>
                 </a:solidFill>
-                <a:latin typeface="Karla"/>
+                <a:latin typeface="Calibri"/>
               </a:rPr>
               <a:t>Agree it as a team, then tick it on the sheet.</a:t>
             </a:r>
@@ -13860,7 +13860,7 @@
                 <a:solidFill>
                   <a:srgbClr val="8B9179"/>
                 </a:solidFill>
-                <a:latin typeface="Karla"/>
+                <a:latin typeface="Calibri"/>
               </a:rPr>
               <a:t>The Pastoral Guide</a:t>
             </a:r>
@@ -13902,7 +13902,7 @@
                 <a:solidFill>
                   <a:srgbClr val="8B9179"/>
                 </a:solidFill>
-                <a:latin typeface="Karla"/>
+                <a:latin typeface="Calibri"/>
               </a:rPr>
               <a:t>3 / 27</a:t>
             </a:r>
@@ -14006,7 +14006,7 @@
                 <a:solidFill>
                   <a:srgbClr val="2F5A44"/>
                 </a:solidFill>
-                <a:latin typeface="Karla"/>
+                <a:latin typeface="Calibri"/>
               </a:rPr>
               <a:t>CHRISTMAS QUIZ  ·  ROUND ONE  ·  QUESTION 2 OF 10</a:t>
             </a:r>
@@ -14182,7 +14182,7 @@
                 <a:solidFill>
                   <a:srgbClr val="FFFDF7"/>
                 </a:solidFill>
-                <a:latin typeface="Karla"/>
+                <a:latin typeface="Calibri"/>
               </a:rPr>
               <a:t>2</a:t>
             </a:r>
@@ -14220,11 +14220,11 @@
               </a:spcAft>
             </a:pPr>
             <a:r>
-              <a:rPr sz="2400" b="1" i="0">
+              <a:rPr sz="2400" b="0" i="0">
                 <a:solidFill>
                   <a:srgbClr val="2F5A44"/>
                 </a:solidFill>
-                <a:latin typeface="Libre Caslon Display"/>
+                <a:latin typeface="Georgia"/>
               </a:rPr>
               <a:t>Writing “Xmas” is a modern way of taking Christ out of Christmas.</a:t>
             </a:r>
@@ -14266,7 +14266,7 @@
                 <a:solidFill>
                   <a:srgbClr val="8B9179"/>
                 </a:solidFill>
-                <a:latin typeface="Karla"/>
+                <a:latin typeface="Calibri"/>
               </a:rPr>
               <a:t>FACT OR MYTH?</a:t>
             </a:r>
@@ -14394,11 +14394,11 @@
               </a:spcAft>
             </a:pPr>
             <a:r>
-              <a:rPr sz="2000" b="1" i="0">
+              <a:rPr sz="2000" b="0" i="0">
                 <a:solidFill>
                   <a:srgbClr val="2F5A44"/>
                 </a:solidFill>
-                <a:latin typeface="Libre Caslon Display"/>
+                <a:latin typeface="Georgia"/>
               </a:rPr>
               <a:t>Fact</a:t>
             </a:r>
@@ -14526,11 +14526,11 @@
               </a:spcAft>
             </a:pPr>
             <a:r>
-              <a:rPr sz="2000" b="1" i="0">
+              <a:rPr sz="2000" b="0" i="0">
                 <a:solidFill>
                   <a:srgbClr val="2F5A44"/>
                 </a:solidFill>
-                <a:latin typeface="Libre Caslon Display"/>
+                <a:latin typeface="Georgia"/>
               </a:rPr>
               <a:t>Myth</a:t>
             </a:r>
@@ -14572,7 +14572,7 @@
                 <a:solidFill>
                   <a:srgbClr val="5C6552"/>
                 </a:solidFill>
-                <a:latin typeface="Karla"/>
+                <a:latin typeface="Calibri"/>
               </a:rPr>
               <a:t>Agree it as a team, then tick it on the sheet.</a:t>
             </a:r>
@@ -14638,7 +14638,7 @@
                 <a:solidFill>
                   <a:srgbClr val="8B9179"/>
                 </a:solidFill>
-                <a:latin typeface="Karla"/>
+                <a:latin typeface="Calibri"/>
               </a:rPr>
               <a:t>The Pastoral Guide</a:t>
             </a:r>
@@ -14680,7 +14680,7 @@
                 <a:solidFill>
                   <a:srgbClr val="8B9179"/>
                 </a:solidFill>
-                <a:latin typeface="Karla"/>
+                <a:latin typeface="Calibri"/>
               </a:rPr>
               <a:t>4 / 27</a:t>
             </a:r>
@@ -14784,7 +14784,7 @@
                 <a:solidFill>
                   <a:srgbClr val="2F5A44"/>
                 </a:solidFill>
-                <a:latin typeface="Karla"/>
+                <a:latin typeface="Calibri"/>
               </a:rPr>
               <a:t>CHRISTMAS QUIZ  ·  ROUND ONE  ·  QUESTION 3 OF 10</a:t>
             </a:r>
@@ -14960,7 +14960,7 @@
                 <a:solidFill>
                   <a:srgbClr val="FFFDF7"/>
                 </a:solidFill>
-                <a:latin typeface="Karla"/>
+                <a:latin typeface="Calibri"/>
               </a:rPr>
               <a:t>3</a:t>
             </a:r>
@@ -14998,11 +14998,11 @@
               </a:spcAft>
             </a:pPr>
             <a:r>
-              <a:rPr sz="2100" b="1" i="0">
+              <a:rPr sz="2100" b="0" i="0">
                 <a:solidFill>
                   <a:srgbClr val="2F5A44"/>
                 </a:solidFill>
-                <a:latin typeface="Libre Caslon Display"/>
+                <a:latin typeface="Georgia"/>
               </a:rPr>
               <a:t>A giant straw goat built every Christmas in Gävle, Sweden, has been destroyed more often than it has survived.</a:t>
             </a:r>
@@ -15044,7 +15044,7 @@
                 <a:solidFill>
                   <a:srgbClr val="8B9179"/>
                 </a:solidFill>
-                <a:latin typeface="Karla"/>
+                <a:latin typeface="Calibri"/>
               </a:rPr>
               <a:t>FACT OR MYTH?</a:t>
             </a:r>
@@ -15172,11 +15172,11 @@
               </a:spcAft>
             </a:pPr>
             <a:r>
-              <a:rPr sz="2000" b="1" i="0">
+              <a:rPr sz="2000" b="0" i="0">
                 <a:solidFill>
                   <a:srgbClr val="2F5A44"/>
                 </a:solidFill>
-                <a:latin typeface="Libre Caslon Display"/>
+                <a:latin typeface="Georgia"/>
               </a:rPr>
               <a:t>Fact</a:t>
             </a:r>
@@ -15304,11 +15304,11 @@
               </a:spcAft>
             </a:pPr>
             <a:r>
-              <a:rPr sz="2000" b="1" i="0">
+              <a:rPr sz="2000" b="0" i="0">
                 <a:solidFill>
                   <a:srgbClr val="2F5A44"/>
                 </a:solidFill>
-                <a:latin typeface="Libre Caslon Display"/>
+                <a:latin typeface="Georgia"/>
               </a:rPr>
               <a:t>Myth</a:t>
             </a:r>
@@ -15350,7 +15350,7 @@
                 <a:solidFill>
                   <a:srgbClr val="5C6552"/>
                 </a:solidFill>
-                <a:latin typeface="Karla"/>
+                <a:latin typeface="Calibri"/>
               </a:rPr>
               <a:t>Agree it as a team, then tick it on the sheet.</a:t>
             </a:r>
@@ -15416,7 +15416,7 @@
                 <a:solidFill>
                   <a:srgbClr val="8B9179"/>
                 </a:solidFill>
-                <a:latin typeface="Karla"/>
+                <a:latin typeface="Calibri"/>
               </a:rPr>
               <a:t>The Pastoral Guide</a:t>
             </a:r>
@@ -15458,7 +15458,7 @@
                 <a:solidFill>
                   <a:srgbClr val="8B9179"/>
                 </a:solidFill>
-                <a:latin typeface="Karla"/>
+                <a:latin typeface="Calibri"/>
               </a:rPr>
               <a:t>5 / 27</a:t>
             </a:r>
@@ -15562,7 +15562,7 @@
                 <a:solidFill>
                   <a:srgbClr val="2F5A44"/>
                 </a:solidFill>
-                <a:latin typeface="Karla"/>
+                <a:latin typeface="Calibri"/>
               </a:rPr>
               <a:t>CHRISTMAS QUIZ  ·  ROUND ONE  ·  QUESTION 4 OF 10</a:t>
             </a:r>
@@ -15738,7 +15738,7 @@
                 <a:solidFill>
                   <a:srgbClr val="FFFDF7"/>
                 </a:solidFill>
-                <a:latin typeface="Karla"/>
+                <a:latin typeface="Calibri"/>
               </a:rPr>
               <a:t>4</a:t>
             </a:r>
@@ -15776,11 +15776,11 @@
               </a:spcAft>
             </a:pPr>
             <a:r>
-              <a:rPr sz="2400" b="1" i="0">
+              <a:rPr sz="2400" b="0" i="0">
                 <a:solidFill>
                   <a:srgbClr val="2F5A44"/>
                 </a:solidFill>
-                <a:latin typeface="Libre Caslon Display"/>
+                <a:latin typeface="Georgia"/>
               </a:rPr>
               <a:t>In the Czech Republic, some families keep their Christmas dinner alive in the bath.</a:t>
             </a:r>
@@ -15822,7 +15822,7 @@
                 <a:solidFill>
                   <a:srgbClr val="8B9179"/>
                 </a:solidFill>
-                <a:latin typeface="Karla"/>
+                <a:latin typeface="Calibri"/>
               </a:rPr>
               <a:t>FACT OR MYTH?</a:t>
             </a:r>
@@ -15950,11 +15950,11 @@
               </a:spcAft>
             </a:pPr>
             <a:r>
-              <a:rPr sz="2000" b="1" i="0">
+              <a:rPr sz="2000" b="0" i="0">
                 <a:solidFill>
                   <a:srgbClr val="2F5A44"/>
                 </a:solidFill>
-                <a:latin typeface="Libre Caslon Display"/>
+                <a:latin typeface="Georgia"/>
               </a:rPr>
               <a:t>Fact</a:t>
             </a:r>
@@ -16082,11 +16082,11 @@
               </a:spcAft>
             </a:pPr>
             <a:r>
-              <a:rPr sz="2000" b="1" i="0">
+              <a:rPr sz="2000" b="0" i="0">
                 <a:solidFill>
                   <a:srgbClr val="2F5A44"/>
                 </a:solidFill>
-                <a:latin typeface="Libre Caslon Display"/>
+                <a:latin typeface="Georgia"/>
               </a:rPr>
               <a:t>Myth</a:t>
             </a:r>
@@ -16128,7 +16128,7 @@
                 <a:solidFill>
                   <a:srgbClr val="5C6552"/>
                 </a:solidFill>
-                <a:latin typeface="Karla"/>
+                <a:latin typeface="Calibri"/>
               </a:rPr>
               <a:t>Agree it as a team, then tick it on the sheet.</a:t>
             </a:r>
@@ -16194,7 +16194,7 @@
                 <a:solidFill>
                   <a:srgbClr val="8B9179"/>
                 </a:solidFill>
-                <a:latin typeface="Karla"/>
+                <a:latin typeface="Calibri"/>
               </a:rPr>
               <a:t>The Pastoral Guide</a:t>
             </a:r>
@@ -16236,7 +16236,7 @@
                 <a:solidFill>
                   <a:srgbClr val="8B9179"/>
                 </a:solidFill>
-                <a:latin typeface="Karla"/>
+                <a:latin typeface="Calibri"/>
               </a:rPr>
               <a:t>6 / 27</a:t>
             </a:r>
@@ -16353,7 +16353,7 @@
                 <a:solidFill>
                   <a:srgbClr val="963A36"/>
                 </a:solidFill>
-                <a:latin typeface="Karla"/>
+                <a:latin typeface="Calibri"/>
               </a:rPr>
               <a:t>ROUND TWO</a:t>
             </a:r>
@@ -16391,11 +16391,11 @@
               </a:spcAft>
             </a:pPr>
             <a:r>
-              <a:rPr sz="4000" b="1" i="0">
+              <a:rPr sz="4000" b="0" i="0">
                 <a:solidFill>
                   <a:srgbClr val="FFFDF7"/>
                 </a:solidFill>
-                <a:latin typeface="Libre Caslon Display"/>
+                <a:latin typeface="Georgia"/>
               </a:rPr>
               <a:t>Choose or write</a:t>
             </a:r>
@@ -16481,7 +16481,7 @@
                 <a:solidFill>
                   <a:srgbClr val="E8C8C3"/>
                 </a:solidFill>
-                <a:latin typeface="Karla"/>
+                <a:latin typeface="Calibri"/>
               </a:rPr>
               <a:t>Six questions. The first three give you options, and the last three you write out in full.</a:t>
             </a:r>
@@ -16547,7 +16547,7 @@
                 <a:solidFill>
                   <a:srgbClr val="E8C8C3"/>
                 </a:solidFill>
-                <a:latin typeface="Karla"/>
+                <a:latin typeface="Calibri"/>
               </a:rPr>
               <a:t>The Pastoral Guide</a:t>
             </a:r>
@@ -16589,7 +16589,7 @@
                 <a:solidFill>
                   <a:srgbClr val="E8C8C3"/>
                 </a:solidFill>
-                <a:latin typeface="Karla"/>
+                <a:latin typeface="Calibri"/>
               </a:rPr>
               <a:t>7 / 27</a:t>
             </a:r>
@@ -16693,7 +16693,7 @@
                 <a:solidFill>
                   <a:srgbClr val="2F5A44"/>
                 </a:solidFill>
-                <a:latin typeface="Karla"/>
+                <a:latin typeface="Calibri"/>
               </a:rPr>
               <a:t>CHRISTMAS QUIZ  ·  ROUND TWO  ·  QUESTION 5 OF 10</a:t>
             </a:r>
@@ -16869,7 +16869,7 @@
                 <a:solidFill>
                   <a:srgbClr val="FFFDF7"/>
                 </a:solidFill>
-                <a:latin typeface="Karla"/>
+                <a:latin typeface="Calibri"/>
               </a:rPr>
               <a:t>5</a:t>
             </a:r>
@@ -16907,11 +16907,11 @@
               </a:spcAft>
             </a:pPr>
             <a:r>
-              <a:rPr sz="2400" b="1" i="0">
+              <a:rPr sz="2400" b="0" i="0">
                 <a:solidFill>
                   <a:srgbClr val="2F5A44"/>
                 </a:solidFill>
-                <a:latin typeface="Libre Caslon Display"/>
+                <a:latin typeface="Georgia"/>
               </a:rPr>
               <a:t>When does Ethiopia celebrate Christmas?</a:t>
             </a:r>
@@ -16953,7 +16953,7 @@
                 <a:solidFill>
                   <a:srgbClr val="8B9179"/>
                 </a:solidFill>
-                <a:latin typeface="Karla"/>
+                <a:latin typeface="Calibri"/>
               </a:rPr>
               <a:t>ONE OF THESE</a:t>
             </a:r>
@@ -17129,7 +17129,7 @@
                 <a:solidFill>
                   <a:srgbClr val="FFFDF7"/>
                 </a:solidFill>
-                <a:latin typeface="Karla"/>
+                <a:latin typeface="Calibri"/>
               </a:rPr>
               <a:t>A</a:t>
             </a:r>
@@ -17171,7 +17171,7 @@
                 <a:solidFill>
                   <a:srgbClr val="2E3436"/>
                 </a:solidFill>
-                <a:latin typeface="Karla"/>
+                <a:latin typeface="Calibri"/>
               </a:rPr>
               <a:t>25 December</a:t>
             </a:r>
@@ -17347,7 +17347,7 @@
                 <a:solidFill>
                   <a:srgbClr val="FFFDF7"/>
                 </a:solidFill>
-                <a:latin typeface="Karla"/>
+                <a:latin typeface="Calibri"/>
               </a:rPr>
               <a:t>B</a:t>
             </a:r>
@@ -17389,7 +17389,7 @@
                 <a:solidFill>
                   <a:srgbClr val="2E3436"/>
                 </a:solidFill>
-                <a:latin typeface="Karla"/>
+                <a:latin typeface="Calibri"/>
               </a:rPr>
               <a:t>7 January</a:t>
             </a:r>
@@ -17565,7 +17565,7 @@
                 <a:solidFill>
                   <a:srgbClr val="FFFDF7"/>
                 </a:solidFill>
-                <a:latin typeface="Karla"/>
+                <a:latin typeface="Calibri"/>
               </a:rPr>
               <a:t>C</a:t>
             </a:r>
@@ -17607,7 +17607,7 @@
                 <a:solidFill>
                   <a:srgbClr val="2E3436"/>
                 </a:solidFill>
-                <a:latin typeface="Karla"/>
+                <a:latin typeface="Calibri"/>
               </a:rPr>
               <a:t>19 January</a:t>
             </a:r>
@@ -17649,7 +17649,7 @@
                 <a:solidFill>
                   <a:srgbClr val="5C6552"/>
                 </a:solidFill>
-                <a:latin typeface="Karla"/>
+                <a:latin typeface="Calibri"/>
               </a:rPr>
               <a:t>Agree it as a team, then tick it on the sheet.</a:t>
             </a:r>
@@ -17715,7 +17715,7 @@
                 <a:solidFill>
                   <a:srgbClr val="8B9179"/>
                 </a:solidFill>
-                <a:latin typeface="Karla"/>
+                <a:latin typeface="Calibri"/>
               </a:rPr>
               <a:t>The Pastoral Guide</a:t>
             </a:r>
@@ -17757,7 +17757,7 @@
                 <a:solidFill>
                   <a:srgbClr val="8B9179"/>
                 </a:solidFill>
-                <a:latin typeface="Karla"/>
+                <a:latin typeface="Calibri"/>
               </a:rPr>
               <a:t>8 / 27</a:t>
             </a:r>
@@ -17861,7 +17861,7 @@
                 <a:solidFill>
                   <a:srgbClr val="2F5A44"/>
                 </a:solidFill>
-                <a:latin typeface="Karla"/>
+                <a:latin typeface="Calibri"/>
               </a:rPr>
               <a:t>CHRISTMAS QUIZ  ·  ROUND TWO  ·  QUESTION 6 OF 10</a:t>
             </a:r>
@@ -18037,7 +18037,7 @@
                 <a:solidFill>
                   <a:srgbClr val="FFFDF7"/>
                 </a:solidFill>
-                <a:latin typeface="Karla"/>
+                <a:latin typeface="Calibri"/>
               </a:rPr>
               <a:t>6</a:t>
             </a:r>
@@ -18075,11 +18075,11 @@
               </a:spcAft>
             </a:pPr>
             <a:r>
-              <a:rPr sz="2100" b="1" i="0">
+              <a:rPr sz="2100" b="0" i="0">
                 <a:solidFill>
                   <a:srgbClr val="2F5A44"/>
                 </a:solidFill>
-                <a:latin typeface="Libre Caslon Display"/>
+                <a:latin typeface="Georgia"/>
               </a:rPr>
               <a:t>In Caracas, Venezuela, how did many people traditionally travel to early morning Christmas church services?</a:t>
             </a:r>
@@ -18121,7 +18121,7 @@
                 <a:solidFill>
                   <a:srgbClr val="8B9179"/>
                 </a:solidFill>
-                <a:latin typeface="Karla"/>
+                <a:latin typeface="Calibri"/>
               </a:rPr>
               <a:t>ONE OF THESE</a:t>
             </a:r>
@@ -18297,7 +18297,7 @@
                 <a:solidFill>
                   <a:srgbClr val="FFFDF7"/>
                 </a:solidFill>
-                <a:latin typeface="Karla"/>
+                <a:latin typeface="Calibri"/>
               </a:rPr>
               <a:t>A</a:t>
             </a:r>
@@ -18339,7 +18339,7 @@
                 <a:solidFill>
                   <a:srgbClr val="2E3436"/>
                 </a:solidFill>
-                <a:latin typeface="Karla"/>
+                <a:latin typeface="Calibri"/>
               </a:rPr>
               <a:t>On horseback</a:t>
             </a:r>
@@ -18515,7 +18515,7 @@
                 <a:solidFill>
                   <a:srgbClr val="FFFDF7"/>
                 </a:solidFill>
-                <a:latin typeface="Karla"/>
+                <a:latin typeface="Calibri"/>
               </a:rPr>
               <a:t>B</a:t>
             </a:r>
@@ -18557,7 +18557,7 @@
                 <a:solidFill>
                   <a:srgbClr val="2E3436"/>
                 </a:solidFill>
-                <a:latin typeface="Karla"/>
+                <a:latin typeface="Calibri"/>
               </a:rPr>
               <a:t>By boat</a:t>
             </a:r>
@@ -18733,7 +18733,7 @@
                 <a:solidFill>
                   <a:srgbClr val="FFFDF7"/>
                 </a:solidFill>
-                <a:latin typeface="Karla"/>
+                <a:latin typeface="Calibri"/>
               </a:rPr>
               <a:t>C</a:t>
             </a:r>
@@ -18775,7 +18775,7 @@
                 <a:solidFill>
                   <a:srgbClr val="2E3436"/>
                 </a:solidFill>
-                <a:latin typeface="Karla"/>
+                <a:latin typeface="Calibri"/>
               </a:rPr>
               <a:t>On roller skates</a:t>
             </a:r>
@@ -18817,7 +18817,7 @@
                 <a:solidFill>
                   <a:srgbClr val="5C6552"/>
                 </a:solidFill>
-                <a:latin typeface="Karla"/>
+                <a:latin typeface="Calibri"/>
               </a:rPr>
               <a:t>Agree it as a team, then tick it on the sheet.</a:t>
             </a:r>
@@ -18883,7 +18883,7 @@
                 <a:solidFill>
                   <a:srgbClr val="8B9179"/>
                 </a:solidFill>
-                <a:latin typeface="Karla"/>
+                <a:latin typeface="Calibri"/>
               </a:rPr>
               <a:t>The Pastoral Guide</a:t>
             </a:r>
@@ -18925,7 +18925,7 @@
                 <a:solidFill>
                   <a:srgbClr val="8B9179"/>
                 </a:solidFill>
-                <a:latin typeface="Karla"/>
+                <a:latin typeface="Calibri"/>
               </a:rPr>
               <a:t>9 / 27</a:t>
             </a:r>
